--- a/content/Lectures/Semester 1/Week 7/1 Lecture/1.7 Ensemble Methods and K-NN (Lecture).pptx
+++ b/content/Lectures/Semester 1/Week 7/1 Lecture/1.7 Ensemble Methods and K-NN (Lecture).pptx
@@ -1604,7 +1604,7 @@
             </a:pPr>
             <a:r>
               <a:rPr lang="en-US" altLang="en-US"/>
-              <a:t>What is the probability that nearest neighbor has same label? P(y=yNN) </a:t>
+              <a:t>What is the probability that the nearest neighbor has the same label? P(y=yNN) </a:t>
             </a:r>
           </a:p>
           <a:p>
@@ -1679,7 +1679,7 @@
               <a:rPr lang="en-US" altLang="en-US">
                 <a:sym typeface="Wingdings" pitchFamily="2" charset="2"/>
               </a:rPr>
-              <a:t> need both random attributes to match the wrong examples</a:t>
+              <a:t> need both random attributes to match the wrong example</a:t>
             </a:r>
             <a:br>
               <a:rPr lang="en-US" altLang="en-US"/>
@@ -1708,7 +1708,7 @@
               <a:rPr lang="en-US" altLang="en-US">
                 <a:sym typeface="Wingdings" pitchFamily="2" charset="2"/>
               </a:rPr>
-              <a:t> need three random attributes to match the wrong examples</a:t>
+              <a:t> need at least three random attributes to match the wrong example</a:t>
             </a:r>
             <a:br>
               <a:rPr lang="en-US" altLang="en-US"/>
@@ -1737,7 +1737,7 @@
               <a:rPr lang="en-US" altLang="en-US">
                 <a:sym typeface="Wingdings" pitchFamily="2" charset="2"/>
               </a:rPr>
-              <a:t> need N/2+1 random attributes to match the wrong examples</a:t>
+              <a:t> need N/2+1 random attributes to match the wrong example</a:t>
             </a:r>
           </a:p>
           <a:p>
@@ -5305,6 +5305,35 @@
           </a:extLst>
         </p:spPr>
       </p:pic>
+      <p:sp>
+        <p:nvSpPr>
+          <p:cNvPr id="4" name="TextBox 3"/>
+          <p:cNvSpPr txBox="1"/>
+          <p:nvPr/>
+        </p:nvSpPr>
+        <p:spPr>
+          <a:xfrm>
+            <a:off x="1886677" y="6309320"/>
+            <a:ext cx="6878572" cy="461665"/>
+          </a:xfrm>
+          <a:prstGeom prst="rect">
+            <a:avLst/>
+          </a:prstGeom>
+          <a:noFill/>
+        </p:spPr>
+        <p:txBody>
+          <a:bodyPr wrap="square" rtlCol="0">
+            <a:spAutoFit/>
+          </a:bodyPr>
+          <a:lstStyle/>
+          <a:p>
+            <a:r>
+              <a:rPr lang="en-GB" sz="1200" i="1" dirty="0"/>
+              <a:t>Simplified: a real bootstrap sample has as many rows as the training data and can repeat rows; scikit-learn draws a new random subset of features at every split.</a:t>
+            </a:r>
+          </a:p>
+        </p:txBody>
+      </p:sp>
     </p:spTree>
     <p:extLst>
       <p:ext uri="{BB962C8B-B14F-4D97-AF65-F5344CB8AC3E}">
@@ -5549,6 +5578,68 @@
           </a:p>
         </p:txBody>
       </p:sp>
+      <p:cxnSp>
+        <p:nvCxnSpPr>
+          <p:cNvPr id="15" name="Straight Arrow Connector 14"/>
+          <p:cNvCxnSpPr/>
+          <p:nvPr/>
+        </p:nvCxnSpPr>
+        <p:spPr>
+          <a:xfrm flipV="1">
+            <a:off x="5394960" y="2770632"/>
+            <a:ext cx="91440" cy="630936"/>
+          </a:xfrm>
+          <a:prstGeom prst="straightConnector1">
+            <a:avLst/>
+          </a:prstGeom>
+          <a:ln>
+            <a:tailEnd type="arrow"/>
+          </a:ln>
+        </p:spPr>
+        <p:style>
+          <a:lnRef idx="1">
+            <a:schemeClr val="accent1"/>
+          </a:lnRef>
+          <a:fillRef idx="0">
+            <a:schemeClr val="accent1"/>
+          </a:fillRef>
+          <a:effectRef idx="0">
+            <a:schemeClr val="accent1"/>
+          </a:effectRef>
+          <a:fontRef idx="minor">
+            <a:schemeClr val="tx1"/>
+          </a:fontRef>
+        </p:style>
+      </p:cxnSp>
+      <p:sp>
+        <p:nvSpPr>
+          <p:cNvPr id="16" name="TextBox 15"/>
+          <p:cNvSpPr txBox="1"/>
+          <p:nvPr/>
+        </p:nvSpPr>
+        <p:spPr>
+          <a:xfrm>
+            <a:off x="1907704" y="3429000"/>
+            <a:ext cx="6984776" cy="646331"/>
+          </a:xfrm>
+          <a:prstGeom prst="rect">
+            <a:avLst/>
+          </a:prstGeom>
+          <a:noFill/>
+        </p:spPr>
+        <p:txBody>
+          <a:bodyPr wrap="square" rtlCol="0">
+            <a:spAutoFit/>
+          </a:bodyPr>
+          <a:lstStyle/>
+          <a:p>
+            <a:r>
+              <a:rPr lang="en-GB" dirty="0"/>
+              <a:t>max_features = 'sqrt': at every split, a tree tries only √(number of features) randomly chosen features</a:t>
+            </a:r>
+          </a:p>
+        </p:txBody>
+      </p:sp>
     </p:spTree>
     <p:extLst>
       <p:ext uri="{BB962C8B-B14F-4D97-AF65-F5344CB8AC3E}">
@@ -7058,7 +7149,15 @@
             </a:r>
             <a:r>
               <a:rPr lang="en-US" altLang="en-US"/>
-              <a:t>-dimensional space and defines neighbors in terms of distance (usually Euclidean in R-space)</a:t>
+              <a:t>-dimensional space and defines neighbors in terms of distance (usually the Euclidean distance in ℝ</a:t>
+            </a:r>
+            <a:r>
+              <a:rPr lang="en-US" altLang="en-US" i="1" baseline="30000"/>
+              <a:t>n</a:t>
+            </a:r>
+            <a:r>
+              <a:rPr lang="en-US" altLang="en-US"/>
+              <a:t>)</a:t>
             </a:r>
           </a:p>
           <a:p>
@@ -10072,7 +10171,7 @@
             </a:pPr>
             <a:r>
               <a:rPr lang="en-US" altLang="en-US" sz="1600"/>
-              <a:t>Others (e.g., normal, cosine)</a:t>
+              <a:t>Others (e.g., Manhattan, Mahalanobis, cosine)</a:t>
             </a:r>
           </a:p>
           <a:p>
@@ -13168,7 +13267,7 @@
             </a:pPr>
             <a:r>
               <a:rPr lang="en-GB" sz="1800" dirty="0"/>
-              <a:t>Research has shown that no optimal number of neighbours suits all kinds of data sets. Each dataset has its own requirements. In the case of a small number of neighbours, the noise will have a higher influence on the result, and a large number of neighbours makes it computationally expensive.</a:t>
+              <a:t>Research has shown that no optimal number of neighbours suits all kinds of data sets. Each dataset has its own requirements. In the case of a small number of neighbours, the noise will have a higher influence on the result, while a large number of neighbours blurs the boundaries between classes and makes it more computationally expensive.</a:t>
             </a:r>
           </a:p>
           <a:p>
@@ -13992,7 +14091,7 @@
           <a:p>
             <a:r>
               <a:rPr lang="en-GB" sz="2000" dirty="0"/>
-              <a:t>1. A brief introduction to the concept of random forest – an ensemble of randomized decision trees. </a:t>
+              <a:t>1. A brief introduction to tree ensembles: bagging, random forests (ensembles of randomized decision trees) and boosting.</a:t>
             </a:r>
           </a:p>
           <a:p>
@@ -14004,7 +14103,7 @@
           <a:p>
             <a:r>
               <a:rPr lang="en-GB" sz="2000" dirty="0"/>
-              <a:t>Lab: Go through a K-NN practice example</a:t>
+              <a:t>Lab: Go through the K-NN practice notebook on the course website (Week 7, 3 Tutorial)</a:t>
             </a:r>
           </a:p>
           <a:p>
